--- a/output/week16/Week16_Presentation_BICT3202_OOAD.pptx
+++ b/output/week16/Week16_Presentation_BICT3202_OOAD.pptx
@@ -6034,7 +6034,7 @@
                 </a:solidFill>
                 <a:latin typeface="Open Sans"/>
               </a:rPr>
-              <a:t>Requirement → Use Case → Classes → Sequence → State → Activity → Design.</a:t>
+              <a:t>Requirement -&gt; Use Case -&gt; Classes -&gt; Sequence -&gt; State -&gt; Activity -&gt; Design.</a:t>
             </a:r>
           </a:p>
         </p:txBody>
@@ -6876,7 +6876,7 @@
                 </a:solidFill>
                 <a:latin typeface="Open Sans"/>
               </a:rPr>
-              <a:t>Inception → Elaboration → Construction → Transition.</a:t>
+              <a:t>Inception -&gt; Elaboration -&gt; Construction -&gt; Transition.</a:t>
             </a:r>
           </a:p>
         </p:txBody>
@@ -8891,7 +8891,7 @@
                 </a:solidFill>
                 <a:latin typeface="Open Sans"/>
               </a:rPr>
-              <a:t>User ← Customer/Agent/Admin · Customer 1—1 Wallet · Wallet 1—0..* Transaction.</a:t>
+              <a:t>User &lt;- Customer/Agent/Admin · Customer 1—1 Wallet · Wallet 1—0..* Transaction.</a:t>
             </a:r>
           </a:p>
         </p:txBody>
@@ -9843,7 +9843,7 @@
                 </a:solidFill>
                 <a:latin typeface="Open Sans"/>
               </a:rPr>
-              <a:t>Read twice → nouns → objects → actors → use cases → models → consistency.</a:t>
+              <a:t>Read twice -&gt; nouns -&gt; objects -&gt; actors -&gt; use cases -&gt; models -&gt; consistency.</a:t>
             </a:r>
           </a:p>
         </p:txBody>
@@ -10254,7 +10254,7 @@
                 </a:solidFill>
                 <a:latin typeface="Open Sans"/>
               </a:rPr>
-              <a:t>Definition → Explanation → Example → Importance.</a:t>
+              <a:t>Definition -&gt; Explanation -&gt; Example -&gt; Importance.</a:t>
             </a:r>
           </a:p>
           <a:p>
@@ -10328,7 +10328,7 @@
                 </a:solidFill>
                 <a:latin typeface="Open Sans"/>
               </a:rPr>
-              <a:t>requirement → actors → use cases → classes → relationships → behaviour → consistency.</a:t>
+              <a:t>requirement -&gt; actors -&gt; use cases -&gt; classes -&gt; relationships -&gt; behaviour -&gt; consistency.</a:t>
             </a:r>
           </a:p>
         </p:txBody>
@@ -11510,7 +11510,7 @@
                 </a:solidFill>
                 <a:latin typeface="Open Sans"/>
               </a:rPr>
-              <a:t>Business Problem → Requirements → … → Model Integration → Implementation.</a:t>
+              <a:t>Business Problem -&gt; Requirements -&gt; … -&gt; Model Integration -&gt; Implementation.</a:t>
             </a:r>
           </a:p>
         </p:txBody>
@@ -11992,7 +11992,7 @@
                 </a:solidFill>
                 <a:latin typeface="Poppins"/>
               </a:rPr>
-              <a:t>Week 15 → Week 16</a:t>
+              <a:t>Week 15 -&gt; Week 16</a:t>
             </a:r>
           </a:p>
         </p:txBody>
